--- a/dist/초2/철학·논리·심리·교육·종교/학습습관/초2_철학·논리·심리·교육·종교_학습습관_01_계획·실행·돌아보기.pptx
+++ b/dist/초2/철학·논리·심리·교육·종교/학습습관/초2_철학·논리·심리·교육·종교_학습습관_01_계획·실행·돌아보기.pptx
@@ -120,20 +120,20 @@
   <p:extLst>
     <p:ext uri="{521415D9-36F7-43E2-AB2F-B90AF26B5E84}">
       <p14:sectionLst xmlns:p14="http://schemas.microsoft.com/office/powerpoint/2010/main">
-        <p14:section name="도입" id="{dde53f40-2bba-98d6-851e-59ddbc3cdbb5}">
+        <p14:section name="도입" id="{90a7c4f2-8996-4a33-9e9f-7e58413a35c6}">
           <p14:sldIdLst>
             <p14:sldId id="256"/>
             <p14:sldId id="257"/>
           </p14:sldIdLst>
         </p14:section>
-        <p14:section name="개념" id="{d97524e1-2f9f-52c9-6191-3cd8fecc4c27}">
+        <p14:section name="개념" id="{96159547-4f75-83ca-7934-b63ffe1f5247}">
           <p14:sldIdLst>
             <p14:sldId id="258"/>
             <p14:sldId id="259"/>
             <p14:sldId id="263"/>
           </p14:sldIdLst>
         </p14:section>
-        <p14:section name="연습" id="{c6372345-e59d-a309-763b-34ee122d909d}">
+        <p14:section name="연습" id="{4df66cf2-ef21-2e7c-a3c2-d308dadc39f3}">
           <p14:sldIdLst>
             <p14:sldId id="260"/>
             <p14:sldId id="261"/>
@@ -141,25 +141,25 @@
             <p14:sldId id="264"/>
           </p14:sldIdLst>
         </p14:section>
-        <p14:section name="개념" id="{7abd860c-9b46-4044-8f42-704ea37950a7}">
+        <p14:section name="개념" id="{ee8653b6-c448-4736-5956-7e2ef16e34ae}">
           <p14:sldIdLst/>
         </p14:section>
-        <p14:section name="연습" id="{e0388885-be9b-44bf-17c6-01702659d687}">
+        <p14:section name="연습" id="{71cd2e17-85a4-db81-c234-f0f9a5bb6060}">
           <p14:sldIdLst/>
         </p14:section>
-        <p14:section name="확인" id="{4d55f16f-3227-85e0-d9b7-c750e94b817e}">
+        <p14:section name="확인" id="{499c18fc-2cf5-3424-5aaa-750b9a21bb92}">
           <p14:sldIdLst>
             <p14:sldId id="265"/>
             <p14:sldId id="266"/>
             <p14:sldId id="267"/>
           </p14:sldIdLst>
         </p14:section>
-        <p14:section name="정리" id="{2da7bcc6-d66c-2f60-d9c6-340168ec933d}">
+        <p14:section name="정리" id="{47711bce-64cb-90c6-0227-6c9504c76ae3}">
           <p14:sldIdLst>
             <p14:sldId id="268"/>
           </p14:sldIdLst>
         </p14:section>
-        <p14:section name="보충" id="{742f837b-065a-9082-40a8-e96350d47e1b}">
+        <p14:section name="보충" id="{f84332c6-f570-42f5-bc1e-082b6639c3e8}">
           <p14:sldIdLst>
             <p14:sldId id="269"/>
           </p14:sldIdLst>
